--- a/~sasano/lecture/pn2/26/P10.pptx
+++ b/~sasano/lecture/pn2/26/P10.pptx
@@ -263,7 +263,7 @@
           <a:p>
             <a:fld id="{91028921-612C-4D4E-97E7-B4FDA0D9F335}" type="datetimeFigureOut">
               <a:rPr kumimoji="1" lang="ja-JP" altLang="en-US" smtClean="0"/>
-              <a:t>2024/12/9</a:t>
+              <a:t>2026/9/28</a:t>
             </a:fld>
             <a:endParaRPr kumimoji="1" lang="ja-JP" altLang="en-US"/>
           </a:p>
@@ -911,7 +911,7 @@
             <a:fld id="{E90ED720-0104-4369-84BC-D37694168613}" type="datetimeFigureOut">
               <a:rPr kumimoji="1" lang="ja-JP" altLang="en-US" smtClean="0"/>
               <a:pPr/>
-              <a:t>2024/12/9</a:t>
+              <a:t>2026/9/28</a:t>
             </a:fld>
             <a:endParaRPr kumimoji="1" lang="ja-JP" altLang="en-US"/>
           </a:p>
@@ -1108,7 +1108,7 @@
             <a:fld id="{E90ED720-0104-4369-84BC-D37694168613}" type="datetimeFigureOut">
               <a:rPr kumimoji="1" lang="ja-JP" altLang="en-US" smtClean="0"/>
               <a:pPr/>
-              <a:t>2024/12/9</a:t>
+              <a:t>2026/9/28</a:t>
             </a:fld>
             <a:endParaRPr kumimoji="1" lang="ja-JP" altLang="en-US"/>
           </a:p>
@@ -1315,7 +1315,7 @@
             <a:fld id="{E90ED720-0104-4369-84BC-D37694168613}" type="datetimeFigureOut">
               <a:rPr kumimoji="1" lang="ja-JP" altLang="en-US" smtClean="0"/>
               <a:pPr/>
-              <a:t>2024/12/9</a:t>
+              <a:t>2026/9/28</a:t>
             </a:fld>
             <a:endParaRPr kumimoji="1" lang="ja-JP" altLang="en-US"/>
           </a:p>
@@ -1512,7 +1512,7 @@
             <a:fld id="{E90ED720-0104-4369-84BC-D37694168613}" type="datetimeFigureOut">
               <a:rPr kumimoji="1" lang="ja-JP" altLang="en-US" smtClean="0"/>
               <a:pPr/>
-              <a:t>2024/12/9</a:t>
+              <a:t>2026/9/28</a:t>
             </a:fld>
             <a:endParaRPr kumimoji="1" lang="ja-JP" altLang="en-US"/>
           </a:p>
@@ -1754,7 +1754,7 @@
             <a:fld id="{E90ED720-0104-4369-84BC-D37694168613}" type="datetimeFigureOut">
               <a:rPr kumimoji="1" lang="ja-JP" altLang="en-US" smtClean="0"/>
               <a:pPr/>
-              <a:t>2024/12/9</a:t>
+              <a:t>2026/9/28</a:t>
             </a:fld>
             <a:endParaRPr kumimoji="1" lang="ja-JP" altLang="en-US"/>
           </a:p>
@@ -2100,7 +2100,7 @@
             <a:fld id="{E90ED720-0104-4369-84BC-D37694168613}" type="datetimeFigureOut">
               <a:rPr kumimoji="1" lang="ja-JP" altLang="en-US" smtClean="0"/>
               <a:pPr/>
-              <a:t>2024/12/9</a:t>
+              <a:t>2026/9/28</a:t>
             </a:fld>
             <a:endParaRPr kumimoji="1" lang="ja-JP" altLang="en-US"/>
           </a:p>
@@ -2580,7 +2580,7 @@
             <a:fld id="{E90ED720-0104-4369-84BC-D37694168613}" type="datetimeFigureOut">
               <a:rPr kumimoji="1" lang="ja-JP" altLang="en-US" smtClean="0"/>
               <a:pPr/>
-              <a:t>2024/12/9</a:t>
+              <a:t>2026/9/28</a:t>
             </a:fld>
             <a:endParaRPr kumimoji="1" lang="ja-JP" altLang="en-US"/>
           </a:p>
@@ -2694,7 +2694,7 @@
             <a:fld id="{E90ED720-0104-4369-84BC-D37694168613}" type="datetimeFigureOut">
               <a:rPr kumimoji="1" lang="ja-JP" altLang="en-US" smtClean="0"/>
               <a:pPr/>
-              <a:t>2024/12/9</a:t>
+              <a:t>2026/9/28</a:t>
             </a:fld>
             <a:endParaRPr kumimoji="1" lang="ja-JP" altLang="en-US"/>
           </a:p>
@@ -2786,7 +2786,7 @@
             <a:fld id="{E90ED720-0104-4369-84BC-D37694168613}" type="datetimeFigureOut">
               <a:rPr kumimoji="1" lang="ja-JP" altLang="en-US" smtClean="0"/>
               <a:pPr/>
-              <a:t>2024/12/9</a:t>
+              <a:t>2026/9/28</a:t>
             </a:fld>
             <a:endParaRPr kumimoji="1" lang="ja-JP" altLang="en-US"/>
           </a:p>
@@ -3090,7 +3090,7 @@
             <a:fld id="{E90ED720-0104-4369-84BC-D37694168613}" type="datetimeFigureOut">
               <a:rPr kumimoji="1" lang="ja-JP" altLang="en-US" smtClean="0"/>
               <a:pPr/>
-              <a:t>2024/12/9</a:t>
+              <a:t>2026/9/28</a:t>
             </a:fld>
             <a:endParaRPr kumimoji="1" lang="ja-JP" altLang="en-US"/>
           </a:p>
@@ -3339,7 +3339,7 @@
             <a:fld id="{E90ED720-0104-4369-84BC-D37694168613}" type="datetimeFigureOut">
               <a:rPr kumimoji="1" lang="ja-JP" altLang="en-US" smtClean="0"/>
               <a:pPr/>
-              <a:t>2024/12/9</a:t>
+              <a:t>2026/9/28</a:t>
             </a:fld>
             <a:endParaRPr kumimoji="1" lang="ja-JP" altLang="en-US"/>
           </a:p>
@@ -3579,7 +3579,7 @@
             <a:fld id="{E90ED720-0104-4369-84BC-D37694168613}" type="datetimeFigureOut">
               <a:rPr kumimoji="1" lang="ja-JP" altLang="en-US" smtClean="0"/>
               <a:pPr/>
-              <a:t>2024/12/9</a:t>
+              <a:t>2026/9/28</a:t>
             </a:fld>
             <a:endParaRPr kumimoji="1" lang="ja-JP" altLang="en-US"/>
           </a:p>
@@ -4040,8 +4040,8 @@
         </p:nvSpPr>
         <p:spPr>
           <a:xfrm>
-            <a:off x="2857488" y="4929198"/>
-            <a:ext cx="3534942" cy="523220"/>
+            <a:off x="3821634" y="5364416"/>
+            <a:ext cx="1500732" cy="523220"/>
           </a:xfrm>
           <a:prstGeom prst="rect">
             <a:avLst/>
@@ -4054,9 +4054,14 @@
           </a:bodyPr>
           <a:lstStyle/>
           <a:p>
+            <a:pPr algn="ctr"/>
+            <a:r>
+              <a:rPr kumimoji="1" lang="ja-JP" altLang="en-US" sz="2800"/>
+              <a:t>篠埜　</a:t>
+            </a:r>
             <a:r>
               <a:rPr kumimoji="1" lang="ja-JP" altLang="en-US" sz="2800" dirty="0"/>
-              <a:t>情報工学科　篠埜　功</a:t>
+              <a:t>功</a:t>
             </a:r>
           </a:p>
         </p:txBody>
